--- a/u04b_interfaces/notes/_b_interfaces2 - default and static methods.pptx
+++ b/u04b_interfaces/notes/_b_interfaces2 - default and static methods.pptx
@@ -5,10 +5,10 @@
     <p:sldMasterId id="2147483648" r:id="rId1"/>
   </p:sldMasterIdLst>
   <p:notesMasterIdLst>
-    <p:notesMasterId r:id="rId36"/>
+    <p:notesMasterId r:id="rId38"/>
   </p:notesMasterIdLst>
   <p:handoutMasterIdLst>
-    <p:handoutMasterId r:id="rId37"/>
+    <p:handoutMasterId r:id="rId39"/>
   </p:handoutMasterIdLst>
   <p:sldIdLst>
     <p:sldId id="664" r:id="rId2"/>
@@ -40,11 +40,13 @@
     <p:sldId id="699" r:id="rId28"/>
     <p:sldId id="657" r:id="rId29"/>
     <p:sldId id="698" r:id="rId30"/>
-    <p:sldId id="658" r:id="rId31"/>
-    <p:sldId id="659" r:id="rId32"/>
-    <p:sldId id="660" r:id="rId33"/>
-    <p:sldId id="662" r:id="rId34"/>
-    <p:sldId id="674" r:id="rId35"/>
+    <p:sldId id="321" r:id="rId31"/>
+    <p:sldId id="700" r:id="rId32"/>
+    <p:sldId id="658" r:id="rId33"/>
+    <p:sldId id="659" r:id="rId34"/>
+    <p:sldId id="660" r:id="rId35"/>
+    <p:sldId id="662" r:id="rId36"/>
+    <p:sldId id="674" r:id="rId37"/>
   </p:sldIdLst>
   <p:sldSz cx="9144000" cy="6858000" type="screen4x3"/>
   <p:notesSz cx="6858000" cy="9144000"/>
@@ -3019,6 +3021,214 @@
 </file>
 
 <file path=ppt/notesSlides/notesSlide24.xml><?xml version="1.0" encoding="utf-8"?>
+<p:notes xmlns:a="http://schemas.openxmlformats.org/drawingml/2006/main" xmlns:r="http://schemas.openxmlformats.org/officeDocument/2006/relationships" xmlns:p="http://schemas.openxmlformats.org/presentationml/2006/main" showMasterSp="0" showMasterPhAnim="0">
+  <p:cSld>
+    <p:spTree>
+      <p:nvGrpSpPr>
+        <p:cNvPr id="1" name="Shape 626"/>
+        <p:cNvGrpSpPr/>
+        <p:nvPr/>
+      </p:nvGrpSpPr>
+      <p:grpSpPr>
+        <a:xfrm>
+          <a:off x="0" y="0"/>
+          <a:ext cx="0" cy="0"/>
+          <a:chOff x="0" y="0"/>
+          <a:chExt cx="0" cy="0"/>
+        </a:xfrm>
+      </p:grpSpPr>
+      <p:sp>
+        <p:nvSpPr>
+          <p:cNvPr id="627" name="Google Shape;627;p66:notes"/>
+          <p:cNvSpPr txBox="1">
+            <a:spLocks noGrp="1"/>
+          </p:cNvSpPr>
+          <p:nvPr>
+            <p:ph type="body" idx="1"/>
+          </p:nvPr>
+        </p:nvSpPr>
+        <p:spPr>
+          <a:xfrm>
+            <a:off x="685800" y="4343400"/>
+            <a:ext cx="5486400" cy="4114800"/>
+          </a:xfrm>
+          <a:prstGeom prst="rect">
+            <a:avLst/>
+          </a:prstGeom>
+        </p:spPr>
+        <p:txBody>
+          <a:bodyPr spcFirstLastPara="1" wrap="square" lIns="91425" tIns="45700" rIns="91425" bIns="45700" anchor="t" anchorCtr="0">
+            <a:noAutofit/>
+          </a:bodyPr>
+          <a:lstStyle/>
+          <a:p>
+            <a:pPr marL="0" lvl="0" indent="0" algn="l" rtl="0">
+              <a:spcBef>
+                <a:spcPts val="360"/>
+              </a:spcBef>
+              <a:spcAft>
+                <a:spcPts val="0"/>
+              </a:spcAft>
+              <a:buNone/>
+            </a:pPr>
+            <a:endParaRPr/>
+          </a:p>
+        </p:txBody>
+      </p:sp>
+      <p:sp>
+        <p:nvSpPr>
+          <p:cNvPr id="628" name="Google Shape;628;p66:notes"/>
+          <p:cNvSpPr>
+            <a:spLocks noGrp="1" noRot="1" noChangeAspect="1"/>
+          </p:cNvSpPr>
+          <p:nvPr>
+            <p:ph type="sldImg" idx="2"/>
+          </p:nvPr>
+        </p:nvSpPr>
+        <p:spPr>
+          <a:xfrm>
+            <a:off x="1143000" y="685800"/>
+            <a:ext cx="4572000" cy="3429000"/>
+          </a:xfrm>
+          <a:custGeom>
+            <a:avLst/>
+            <a:gdLst/>
+            <a:ahLst/>
+            <a:cxnLst/>
+            <a:rect l="l" t="t" r="r" b="b"/>
+            <a:pathLst>
+              <a:path w="120000" h="120000" extrusionOk="0">
+                <a:moveTo>
+                  <a:pt x="0" y="0"/>
+                </a:moveTo>
+                <a:lnTo>
+                  <a:pt x="120000" y="0"/>
+                </a:lnTo>
+                <a:lnTo>
+                  <a:pt x="120000" y="120000"/>
+                </a:lnTo>
+                <a:lnTo>
+                  <a:pt x="0" y="120000"/>
+                </a:lnTo>
+                <a:close/>
+              </a:path>
+            </a:pathLst>
+          </a:custGeom>
+        </p:spPr>
+      </p:sp>
+    </p:spTree>
+  </p:cSld>
+  <p:clrMapOvr>
+    <a:masterClrMapping/>
+  </p:clrMapOvr>
+</p:notes>
+</file>
+
+<file path=ppt/notesSlides/notesSlide25.xml><?xml version="1.0" encoding="utf-8"?>
+<p:notes xmlns:a="http://schemas.openxmlformats.org/drawingml/2006/main" xmlns:r="http://schemas.openxmlformats.org/officeDocument/2006/relationships" xmlns:p="http://schemas.openxmlformats.org/presentationml/2006/main" showMasterSp="0" showMasterPhAnim="0">
+  <p:cSld>
+    <p:spTree>
+      <p:nvGrpSpPr>
+        <p:cNvPr id="1" name="Shape 626"/>
+        <p:cNvGrpSpPr/>
+        <p:nvPr/>
+      </p:nvGrpSpPr>
+      <p:grpSpPr>
+        <a:xfrm>
+          <a:off x="0" y="0"/>
+          <a:ext cx="0" cy="0"/>
+          <a:chOff x="0" y="0"/>
+          <a:chExt cx="0" cy="0"/>
+        </a:xfrm>
+      </p:grpSpPr>
+      <p:sp>
+        <p:nvSpPr>
+          <p:cNvPr id="627" name="Google Shape;627;p66:notes"/>
+          <p:cNvSpPr txBox="1">
+            <a:spLocks noGrp="1"/>
+          </p:cNvSpPr>
+          <p:nvPr>
+            <p:ph type="body" idx="1"/>
+          </p:nvPr>
+        </p:nvSpPr>
+        <p:spPr>
+          <a:xfrm>
+            <a:off x="685800" y="4343400"/>
+            <a:ext cx="5486400" cy="4114800"/>
+          </a:xfrm>
+          <a:prstGeom prst="rect">
+            <a:avLst/>
+          </a:prstGeom>
+        </p:spPr>
+        <p:txBody>
+          <a:bodyPr spcFirstLastPara="1" wrap="square" lIns="91425" tIns="45700" rIns="91425" bIns="45700" anchor="t" anchorCtr="0">
+            <a:noAutofit/>
+          </a:bodyPr>
+          <a:lstStyle/>
+          <a:p>
+            <a:pPr marL="0" lvl="0" indent="0" algn="l" rtl="0">
+              <a:spcBef>
+                <a:spcPts val="360"/>
+              </a:spcBef>
+              <a:spcAft>
+                <a:spcPts val="0"/>
+              </a:spcAft>
+              <a:buNone/>
+            </a:pPr>
+            <a:endParaRPr/>
+          </a:p>
+        </p:txBody>
+      </p:sp>
+      <p:sp>
+        <p:nvSpPr>
+          <p:cNvPr id="628" name="Google Shape;628;p66:notes"/>
+          <p:cNvSpPr>
+            <a:spLocks noGrp="1" noRot="1" noChangeAspect="1"/>
+          </p:cNvSpPr>
+          <p:nvPr>
+            <p:ph type="sldImg" idx="2"/>
+          </p:nvPr>
+        </p:nvSpPr>
+        <p:spPr>
+          <a:xfrm>
+            <a:off x="1143000" y="685800"/>
+            <a:ext cx="4572000" cy="3429000"/>
+          </a:xfrm>
+          <a:custGeom>
+            <a:avLst/>
+            <a:gdLst/>
+            <a:ahLst/>
+            <a:cxnLst/>
+            <a:rect l="l" t="t" r="r" b="b"/>
+            <a:pathLst>
+              <a:path w="120000" h="120000" extrusionOk="0">
+                <a:moveTo>
+                  <a:pt x="0" y="0"/>
+                </a:moveTo>
+                <a:lnTo>
+                  <a:pt x="120000" y="0"/>
+                </a:lnTo>
+                <a:lnTo>
+                  <a:pt x="120000" y="120000"/>
+                </a:lnTo>
+                <a:lnTo>
+                  <a:pt x="0" y="120000"/>
+                </a:lnTo>
+                <a:close/>
+              </a:path>
+            </a:pathLst>
+          </a:custGeom>
+        </p:spPr>
+      </p:sp>
+    </p:spTree>
+  </p:cSld>
+  <p:clrMapOvr>
+    <a:masterClrMapping/>
+  </p:clrMapOvr>
+</p:notes>
+</file>
+
+<file path=ppt/notesSlides/notesSlide26.xml><?xml version="1.0" encoding="utf-8"?>
 <p:notes xmlns:a="http://schemas.openxmlformats.org/drawingml/2006/main" xmlns:r="http://schemas.openxmlformats.org/officeDocument/2006/relationships" xmlns:p="http://schemas.openxmlformats.org/presentationml/2006/main">
   <p:cSld>
     <p:spTree>
@@ -16496,6 +16706,868 @@
   <p:cSld>
     <p:spTree>
       <p:nvGrpSpPr>
+        <p:cNvPr id="1" name="Shape 629"/>
+        <p:cNvGrpSpPr/>
+        <p:nvPr/>
+      </p:nvGrpSpPr>
+      <p:grpSpPr>
+        <a:xfrm>
+          <a:off x="0" y="0"/>
+          <a:ext cx="0" cy="0"/>
+          <a:chOff x="0" y="0"/>
+          <a:chExt cx="0" cy="0"/>
+        </a:xfrm>
+      </p:grpSpPr>
+      <p:sp>
+        <p:nvSpPr>
+          <p:cNvPr id="630" name="Google Shape;630;p66"/>
+          <p:cNvSpPr txBox="1">
+            <a:spLocks noGrp="1"/>
+          </p:cNvSpPr>
+          <p:nvPr>
+            <p:ph type="ctrTitle"/>
+          </p:nvPr>
+        </p:nvSpPr>
+        <p:spPr>
+          <a:xfrm>
+            <a:off x="1257300" y="533400"/>
+            <a:ext cx="6858000" cy="858837"/>
+          </a:xfrm>
+          <a:prstGeom prst="rect">
+            <a:avLst/>
+          </a:prstGeom>
+          <a:noFill/>
+          <a:ln>
+            <a:noFill/>
+          </a:ln>
+        </p:spPr>
+        <p:txBody>
+          <a:bodyPr spcFirstLastPara="1" wrap="square" lIns="91425" tIns="45700" rIns="91425" bIns="45700" anchor="b" anchorCtr="0">
+            <a:noAutofit/>
+          </a:bodyPr>
+          <a:lstStyle/>
+          <a:p>
+            <a:pPr marL="0" lvl="0" indent="0" algn="ctr" rtl="0">
+              <a:spcBef>
+                <a:spcPts val="0"/>
+              </a:spcBef>
+              <a:spcAft>
+                <a:spcPts val="0"/>
+              </a:spcAft>
+              <a:buNone/>
+            </a:pPr>
+            <a:r>
+              <a:rPr lang="en-US">
+                <a:solidFill>
+                  <a:srgbClr val="008000"/>
+                </a:solidFill>
+              </a:rPr>
+              <a:t>Valid</a:t>
+            </a:r>
+            <a:r>
+              <a:rPr lang="en-US"/>
+              <a:t> or </a:t>
+            </a:r>
+            <a:r>
+              <a:rPr lang="en-US">
+                <a:solidFill>
+                  <a:srgbClr val="C00000"/>
+                </a:solidFill>
+              </a:rPr>
+              <a:t>Invalid</a:t>
+            </a:r>
+            <a:r>
+              <a:rPr lang="en-US"/>
+              <a:t>?</a:t>
+            </a:r>
+            <a:endParaRPr/>
+          </a:p>
+        </p:txBody>
+      </p:sp>
+      <p:sp>
+        <p:nvSpPr>
+          <p:cNvPr id="631" name="Google Shape;631;p66"/>
+          <p:cNvSpPr txBox="1">
+            <a:spLocks noGrp="1"/>
+          </p:cNvSpPr>
+          <p:nvPr>
+            <p:ph type="subTitle" idx="1"/>
+          </p:nvPr>
+        </p:nvSpPr>
+        <p:spPr>
+          <a:xfrm>
+            <a:off x="381000" y="1596483"/>
+            <a:ext cx="8382000" cy="2667000"/>
+          </a:xfrm>
+          <a:prstGeom prst="rect">
+            <a:avLst/>
+          </a:prstGeom>
+          <a:noFill/>
+          <a:ln>
+            <a:noFill/>
+          </a:ln>
+        </p:spPr>
+        <p:txBody>
+          <a:bodyPr spcFirstLastPara="1" wrap="square" lIns="91425" tIns="45700" rIns="91425" bIns="45700" anchor="t" anchorCtr="0">
+            <a:noAutofit/>
+          </a:bodyPr>
+          <a:lstStyle/>
+          <a:p>
+            <a:pPr marL="0" marR="0" lvl="0" indent="0" algn="l" rtl="0">
+              <a:spcBef>
+                <a:spcPts val="0"/>
+              </a:spcBef>
+              <a:spcAft>
+                <a:spcPts val="0"/>
+              </a:spcAft>
+              <a:buClr>
+                <a:schemeClr val="dk1"/>
+              </a:buClr>
+              <a:buSzPts val="3200"/>
+              <a:buFont typeface="Courier New"/>
+              <a:buNone/>
+            </a:pPr>
+            <a:r>
+              <a:rPr lang="en-US" sz="3200" b="1" dirty="0">
+                <a:latin typeface="Courier New"/>
+                <a:ea typeface="Courier New"/>
+                <a:cs typeface="Courier New"/>
+                <a:sym typeface="Courier New"/>
+              </a:rPr>
+              <a:t>public interface A</a:t>
+            </a:r>
+            <a:endParaRPr sz="3200" b="1" dirty="0">
+              <a:latin typeface="Times New Roman"/>
+              <a:ea typeface="Times New Roman"/>
+              <a:cs typeface="Times New Roman"/>
+              <a:sym typeface="Times New Roman"/>
+            </a:endParaRPr>
+          </a:p>
+          <a:p>
+            <a:pPr marL="0" marR="0" lvl="0" indent="0" algn="l" rtl="0">
+              <a:spcBef>
+                <a:spcPts val="0"/>
+              </a:spcBef>
+              <a:spcAft>
+                <a:spcPts val="0"/>
+              </a:spcAft>
+              <a:buClr>
+                <a:schemeClr val="dk1"/>
+              </a:buClr>
+              <a:buSzPts val="3200"/>
+              <a:buFont typeface="Courier New"/>
+              <a:buNone/>
+            </a:pPr>
+            <a:r>
+              <a:rPr lang="en-US" sz="3200" b="1" dirty="0">
+                <a:latin typeface="Courier New"/>
+                <a:ea typeface="Courier New"/>
+                <a:cs typeface="Courier New"/>
+                <a:sym typeface="Courier New"/>
+              </a:rPr>
+              <a:t>{</a:t>
+            </a:r>
+            <a:endParaRPr sz="3200" b="1" dirty="0">
+              <a:latin typeface="Times New Roman"/>
+              <a:ea typeface="Times New Roman"/>
+              <a:cs typeface="Times New Roman"/>
+              <a:sym typeface="Times New Roman"/>
+            </a:endParaRPr>
+          </a:p>
+          <a:p>
+            <a:pPr marL="0" marR="0" lvl="0" indent="0" algn="l" rtl="0">
+              <a:spcBef>
+                <a:spcPts val="0"/>
+              </a:spcBef>
+              <a:spcAft>
+                <a:spcPts val="0"/>
+              </a:spcAft>
+              <a:buClr>
+                <a:schemeClr val="dk1"/>
+              </a:buClr>
+              <a:buSzPts val="3200"/>
+              <a:buFont typeface="Courier New"/>
+              <a:buNone/>
+            </a:pPr>
+            <a:r>
+              <a:rPr lang="en-US" sz="3200" b="1" dirty="0">
+                <a:latin typeface="Courier New"/>
+                <a:ea typeface="Courier New"/>
+                <a:cs typeface="Courier New"/>
+                <a:sym typeface="Courier New"/>
+              </a:rPr>
+              <a:t>   private int </a:t>
+            </a:r>
+            <a:r>
+              <a:rPr lang="en-US" sz="3200" b="1" dirty="0" err="1">
+                <a:latin typeface="Courier New"/>
+                <a:ea typeface="Courier New"/>
+                <a:cs typeface="Courier New"/>
+                <a:sym typeface="Courier New"/>
+              </a:rPr>
+              <a:t>calcAnswer</a:t>
+            </a:r>
+            <a:r>
+              <a:rPr lang="en-US" sz="3200" b="1" dirty="0">
+                <a:latin typeface="Courier New"/>
+                <a:ea typeface="Courier New"/>
+                <a:cs typeface="Courier New"/>
+                <a:sym typeface="Courier New"/>
+              </a:rPr>
+              <a:t>() { }</a:t>
+            </a:r>
+            <a:endParaRPr sz="3200" b="1" dirty="0">
+              <a:latin typeface="Times New Roman"/>
+              <a:ea typeface="Times New Roman"/>
+              <a:cs typeface="Times New Roman"/>
+              <a:sym typeface="Times New Roman"/>
+            </a:endParaRPr>
+          </a:p>
+          <a:p>
+            <a:pPr marL="0" marR="0" lvl="0" indent="0" algn="l" rtl="0">
+              <a:spcBef>
+                <a:spcPts val="0"/>
+              </a:spcBef>
+              <a:spcAft>
+                <a:spcPts val="0"/>
+              </a:spcAft>
+              <a:buClr>
+                <a:schemeClr val="dk1"/>
+              </a:buClr>
+              <a:buSzPts val="3200"/>
+              <a:buFont typeface="Courier New"/>
+              <a:buNone/>
+            </a:pPr>
+            <a:r>
+              <a:rPr lang="en-US" sz="3200" b="1" dirty="0">
+                <a:latin typeface="Courier New"/>
+                <a:ea typeface="Courier New"/>
+                <a:cs typeface="Courier New"/>
+                <a:sym typeface="Courier New"/>
+              </a:rPr>
+              <a:t>   public static final int n = 5;   </a:t>
+            </a:r>
+            <a:endParaRPr sz="3200" b="1" dirty="0">
+              <a:latin typeface="Times New Roman"/>
+              <a:ea typeface="Times New Roman"/>
+              <a:cs typeface="Times New Roman"/>
+              <a:sym typeface="Times New Roman"/>
+            </a:endParaRPr>
+          </a:p>
+          <a:p>
+            <a:pPr marL="0" marR="0" lvl="0" indent="0" algn="l" rtl="0">
+              <a:spcBef>
+                <a:spcPts val="0"/>
+              </a:spcBef>
+              <a:spcAft>
+                <a:spcPts val="0"/>
+              </a:spcAft>
+              <a:buClr>
+                <a:schemeClr val="dk1"/>
+              </a:buClr>
+              <a:buSzPts val="3200"/>
+              <a:buFont typeface="Courier New"/>
+              <a:buNone/>
+            </a:pPr>
+            <a:r>
+              <a:rPr lang="en-US" sz="3200" b="1" dirty="0">
+                <a:latin typeface="Courier New"/>
+                <a:ea typeface="Courier New"/>
+                <a:cs typeface="Courier New"/>
+                <a:sym typeface="Courier New"/>
+              </a:rPr>
+              <a:t>}</a:t>
+            </a:r>
+            <a:endParaRPr sz="3200" b="1" dirty="0">
+              <a:latin typeface="Times New Roman"/>
+              <a:ea typeface="Times New Roman"/>
+              <a:cs typeface="Times New Roman"/>
+              <a:sym typeface="Times New Roman"/>
+            </a:endParaRPr>
+          </a:p>
+        </p:txBody>
+      </p:sp>
+      <p:sp>
+        <p:nvSpPr>
+          <p:cNvPr id="632" name="Google Shape;632;p66"/>
+          <p:cNvSpPr txBox="1"/>
+          <p:nvPr/>
+        </p:nvSpPr>
+        <p:spPr>
+          <a:xfrm>
+            <a:off x="381000" y="4150113"/>
+            <a:ext cx="8610600" cy="2554505"/>
+          </a:xfrm>
+          <a:prstGeom prst="rect">
+            <a:avLst/>
+          </a:prstGeom>
+          <a:noFill/>
+          <a:ln>
+            <a:noFill/>
+          </a:ln>
+        </p:spPr>
+        <p:txBody>
+          <a:bodyPr spcFirstLastPara="1" wrap="square" lIns="91425" tIns="45700" rIns="91425" bIns="45700" anchor="t" anchorCtr="0">
+            <a:spAutoFit/>
+          </a:bodyPr>
+          <a:lstStyle/>
+          <a:p>
+            <a:pPr marL="0" marR="0" lvl="0" indent="0" algn="l" rtl="0">
+              <a:spcBef>
+                <a:spcPts val="0"/>
+              </a:spcBef>
+              <a:spcAft>
+                <a:spcPts val="0"/>
+              </a:spcAft>
+              <a:buNone/>
+            </a:pPr>
+            <a:r>
+              <a:rPr lang="en-US" sz="4000" dirty="0">
+                <a:solidFill>
+                  <a:srgbClr val="008000"/>
+                </a:solidFill>
+                <a:latin typeface="Tahoma"/>
+                <a:ea typeface="Tahoma"/>
+                <a:cs typeface="Tahoma"/>
+                <a:sym typeface="Tahoma"/>
+              </a:rPr>
+              <a:t>Valid! – you CAN declare a method as private, but it must be concrete. The final variable was initialized, so that part is good.</a:t>
+            </a:r>
+            <a:endParaRPr dirty="0">
+              <a:solidFill>
+                <a:srgbClr val="008000"/>
+              </a:solidFill>
+            </a:endParaRPr>
+          </a:p>
+        </p:txBody>
+      </p:sp>
+    </p:spTree>
+  </p:cSld>
+  <p:clrMapOvr>
+    <a:masterClrMapping/>
+  </p:clrMapOvr>
+  <p:timing>
+    <p:tnLst>
+      <p:par>
+        <p:cTn id="1" dur="indefinite" restart="never" nodeType="tmRoot">
+          <p:childTnLst>
+            <p:seq concurrent="1" nextAc="seek">
+              <p:cTn id="2" dur="indefinite" nodeType="mainSeq">
+                <p:childTnLst>
+                  <p:par>
+                    <p:cTn id="3" fill="hold">
+                      <p:stCondLst>
+                        <p:cond delay="indefinite"/>
+                      </p:stCondLst>
+                      <p:childTnLst>
+                        <p:par>
+                          <p:cTn id="4" fill="hold">
+                            <p:stCondLst>
+                              <p:cond delay="0"/>
+                            </p:stCondLst>
+                            <p:childTnLst>
+                              <p:par>
+                                <p:cTn id="5" presetID="10" presetClass="entr" presetSubtype="0" fill="hold" nodeType="clickEffect">
+                                  <p:stCondLst>
+                                    <p:cond delay="0"/>
+                                  </p:stCondLst>
+                                  <p:childTnLst>
+                                    <p:set>
+                                      <p:cBhvr>
+                                        <p:cTn id="6" dur="1" fill="hold">
+                                          <p:stCondLst>
+                                            <p:cond delay="0"/>
+                                          </p:stCondLst>
+                                        </p:cTn>
+                                        <p:tgtEl>
+                                          <p:spTgt spid="632"/>
+                                        </p:tgtEl>
+                                        <p:attrNameLst>
+                                          <p:attrName>style.visibility</p:attrName>
+                                        </p:attrNameLst>
+                                      </p:cBhvr>
+                                      <p:to>
+                                        <p:strVal val="visible"/>
+                                      </p:to>
+                                    </p:set>
+                                    <p:animEffect transition="in" filter="fade">
+                                      <p:cBhvr>
+                                        <p:cTn id="7" dur="2000"/>
+                                        <p:tgtEl>
+                                          <p:spTgt spid="632"/>
+                                        </p:tgtEl>
+                                      </p:cBhvr>
+                                    </p:animEffect>
+                                  </p:childTnLst>
+                                </p:cTn>
+                              </p:par>
+                            </p:childTnLst>
+                          </p:cTn>
+                        </p:par>
+                      </p:childTnLst>
+                    </p:cTn>
+                  </p:par>
+                </p:childTnLst>
+              </p:cTn>
+              <p:prevCondLst>
+                <p:cond evt="onPrev" delay="0">
+                  <p:tgtEl>
+                    <p:sldTgt/>
+                  </p:tgtEl>
+                </p:cond>
+              </p:prevCondLst>
+              <p:nextCondLst>
+                <p:cond evt="onNext" delay="0">
+                  <p:tgtEl>
+                    <p:sldTgt/>
+                  </p:tgtEl>
+                </p:cond>
+              </p:nextCondLst>
+            </p:seq>
+          </p:childTnLst>
+        </p:cTn>
+      </p:par>
+    </p:tnLst>
+  </p:timing>
+</p:sld>
+</file>
+
+<file path=ppt/slides/slide31.xml><?xml version="1.0" encoding="utf-8"?>
+<p:sld xmlns:a="http://schemas.openxmlformats.org/drawingml/2006/main" xmlns:r="http://schemas.openxmlformats.org/officeDocument/2006/relationships" xmlns:p="http://schemas.openxmlformats.org/presentationml/2006/main">
+  <p:cSld>
+    <p:spTree>
+      <p:nvGrpSpPr>
+        <p:cNvPr id="1" name="Shape 629"/>
+        <p:cNvGrpSpPr/>
+        <p:nvPr/>
+      </p:nvGrpSpPr>
+      <p:grpSpPr>
+        <a:xfrm>
+          <a:off x="0" y="0"/>
+          <a:ext cx="0" cy="0"/>
+          <a:chOff x="0" y="0"/>
+          <a:chExt cx="0" cy="0"/>
+        </a:xfrm>
+      </p:grpSpPr>
+      <p:sp>
+        <p:nvSpPr>
+          <p:cNvPr id="630" name="Google Shape;630;p66"/>
+          <p:cNvSpPr txBox="1">
+            <a:spLocks noGrp="1"/>
+          </p:cNvSpPr>
+          <p:nvPr>
+            <p:ph type="ctrTitle"/>
+          </p:nvPr>
+        </p:nvSpPr>
+        <p:spPr>
+          <a:xfrm>
+            <a:off x="1257300" y="533400"/>
+            <a:ext cx="6858000" cy="858837"/>
+          </a:xfrm>
+          <a:prstGeom prst="rect">
+            <a:avLst/>
+          </a:prstGeom>
+          <a:noFill/>
+          <a:ln>
+            <a:noFill/>
+          </a:ln>
+        </p:spPr>
+        <p:txBody>
+          <a:bodyPr spcFirstLastPara="1" wrap="square" lIns="91425" tIns="45700" rIns="91425" bIns="45700" anchor="b" anchorCtr="0">
+            <a:noAutofit/>
+          </a:bodyPr>
+          <a:lstStyle/>
+          <a:p>
+            <a:pPr marL="0" lvl="0" indent="0" algn="ctr" rtl="0">
+              <a:spcBef>
+                <a:spcPts val="0"/>
+              </a:spcBef>
+              <a:spcAft>
+                <a:spcPts val="0"/>
+              </a:spcAft>
+              <a:buNone/>
+            </a:pPr>
+            <a:r>
+              <a:rPr lang="en-US">
+                <a:solidFill>
+                  <a:srgbClr val="008000"/>
+                </a:solidFill>
+              </a:rPr>
+              <a:t>Valid</a:t>
+            </a:r>
+            <a:r>
+              <a:rPr lang="en-US"/>
+              <a:t> or </a:t>
+            </a:r>
+            <a:r>
+              <a:rPr lang="en-US">
+                <a:solidFill>
+                  <a:srgbClr val="C00000"/>
+                </a:solidFill>
+              </a:rPr>
+              <a:t>Invalid</a:t>
+            </a:r>
+            <a:r>
+              <a:rPr lang="en-US"/>
+              <a:t>?</a:t>
+            </a:r>
+            <a:endParaRPr/>
+          </a:p>
+        </p:txBody>
+      </p:sp>
+      <p:sp>
+        <p:nvSpPr>
+          <p:cNvPr id="631" name="Google Shape;631;p66"/>
+          <p:cNvSpPr txBox="1">
+            <a:spLocks noGrp="1"/>
+          </p:cNvSpPr>
+          <p:nvPr>
+            <p:ph type="subTitle" idx="1"/>
+          </p:nvPr>
+        </p:nvSpPr>
+        <p:spPr>
+          <a:xfrm>
+            <a:off x="381000" y="1596483"/>
+            <a:ext cx="8382000" cy="2667000"/>
+          </a:xfrm>
+          <a:prstGeom prst="rect">
+            <a:avLst/>
+          </a:prstGeom>
+          <a:noFill/>
+          <a:ln>
+            <a:noFill/>
+          </a:ln>
+        </p:spPr>
+        <p:txBody>
+          <a:bodyPr spcFirstLastPara="1" wrap="square" lIns="91425" tIns="45700" rIns="91425" bIns="45700" anchor="t" anchorCtr="0">
+            <a:noAutofit/>
+          </a:bodyPr>
+          <a:lstStyle/>
+          <a:p>
+            <a:pPr marL="0" marR="0" lvl="0" indent="0" algn="l" rtl="0">
+              <a:spcBef>
+                <a:spcPts val="0"/>
+              </a:spcBef>
+              <a:spcAft>
+                <a:spcPts val="0"/>
+              </a:spcAft>
+              <a:buClr>
+                <a:schemeClr val="dk1"/>
+              </a:buClr>
+              <a:buSzPts val="3200"/>
+              <a:buFont typeface="Courier New"/>
+              <a:buNone/>
+            </a:pPr>
+            <a:r>
+              <a:rPr lang="en-US" sz="3200" b="1" dirty="0">
+                <a:latin typeface="Courier New"/>
+                <a:ea typeface="Courier New"/>
+                <a:cs typeface="Courier New"/>
+                <a:sym typeface="Courier New"/>
+              </a:rPr>
+              <a:t>public interface A</a:t>
+            </a:r>
+            <a:endParaRPr sz="3200" b="1" dirty="0">
+              <a:latin typeface="Times New Roman"/>
+              <a:ea typeface="Times New Roman"/>
+              <a:cs typeface="Times New Roman"/>
+              <a:sym typeface="Times New Roman"/>
+            </a:endParaRPr>
+          </a:p>
+          <a:p>
+            <a:pPr marL="0" marR="0" lvl="0" indent="0" algn="l" rtl="0">
+              <a:spcBef>
+                <a:spcPts val="0"/>
+              </a:spcBef>
+              <a:spcAft>
+                <a:spcPts val="0"/>
+              </a:spcAft>
+              <a:buClr>
+                <a:schemeClr val="dk1"/>
+              </a:buClr>
+              <a:buSzPts val="3200"/>
+              <a:buFont typeface="Courier New"/>
+              <a:buNone/>
+            </a:pPr>
+            <a:r>
+              <a:rPr lang="en-US" sz="3200" b="1" dirty="0">
+                <a:latin typeface="Courier New"/>
+                <a:ea typeface="Courier New"/>
+                <a:cs typeface="Courier New"/>
+                <a:sym typeface="Courier New"/>
+              </a:rPr>
+              <a:t>{</a:t>
+            </a:r>
+            <a:endParaRPr sz="3200" b="1" dirty="0">
+              <a:latin typeface="Times New Roman"/>
+              <a:ea typeface="Times New Roman"/>
+              <a:cs typeface="Times New Roman"/>
+              <a:sym typeface="Times New Roman"/>
+            </a:endParaRPr>
+          </a:p>
+          <a:p>
+            <a:pPr marL="0" marR="0" lvl="0" indent="0" algn="l" rtl="0">
+              <a:spcBef>
+                <a:spcPts val="0"/>
+              </a:spcBef>
+              <a:spcAft>
+                <a:spcPts val="0"/>
+              </a:spcAft>
+              <a:buClr>
+                <a:schemeClr val="dk1"/>
+              </a:buClr>
+              <a:buSzPts val="3200"/>
+              <a:buFont typeface="Courier New"/>
+              <a:buNone/>
+            </a:pPr>
+            <a:r>
+              <a:rPr lang="en-US" sz="3200" b="1" dirty="0">
+                <a:latin typeface="Courier New"/>
+                <a:ea typeface="Courier New"/>
+                <a:cs typeface="Courier New"/>
+                <a:sym typeface="Courier New"/>
+              </a:rPr>
+              <a:t>   private int </a:t>
+            </a:r>
+            <a:r>
+              <a:rPr lang="en-US" sz="3200" b="1" dirty="0" err="1">
+                <a:latin typeface="Courier New"/>
+                <a:ea typeface="Courier New"/>
+                <a:cs typeface="Courier New"/>
+                <a:sym typeface="Courier New"/>
+              </a:rPr>
+              <a:t>calcAnswer</a:t>
+            </a:r>
+            <a:r>
+              <a:rPr lang="en-US" sz="3200" b="1" dirty="0">
+                <a:latin typeface="Courier New"/>
+                <a:ea typeface="Courier New"/>
+                <a:cs typeface="Courier New"/>
+                <a:sym typeface="Courier New"/>
+              </a:rPr>
+              <a:t>();</a:t>
+            </a:r>
+            <a:endParaRPr sz="3200" b="1" dirty="0">
+              <a:latin typeface="Times New Roman"/>
+              <a:ea typeface="Times New Roman"/>
+              <a:cs typeface="Times New Roman"/>
+              <a:sym typeface="Times New Roman"/>
+            </a:endParaRPr>
+          </a:p>
+          <a:p>
+            <a:pPr marL="0" marR="0" lvl="0" indent="0" algn="l" rtl="0">
+              <a:spcBef>
+                <a:spcPts val="0"/>
+              </a:spcBef>
+              <a:spcAft>
+                <a:spcPts val="0"/>
+              </a:spcAft>
+              <a:buClr>
+                <a:schemeClr val="dk1"/>
+              </a:buClr>
+              <a:buSzPts val="3200"/>
+              <a:buFont typeface="Courier New"/>
+              <a:buNone/>
+            </a:pPr>
+            <a:r>
+              <a:rPr lang="en-US" sz="3200" b="1" dirty="0">
+                <a:latin typeface="Courier New"/>
+                <a:ea typeface="Courier New"/>
+                <a:cs typeface="Courier New"/>
+                <a:sym typeface="Courier New"/>
+              </a:rPr>
+              <a:t>   public static final int n = 5;   </a:t>
+            </a:r>
+            <a:endParaRPr sz="3200" b="1" dirty="0">
+              <a:latin typeface="Times New Roman"/>
+              <a:ea typeface="Times New Roman"/>
+              <a:cs typeface="Times New Roman"/>
+              <a:sym typeface="Times New Roman"/>
+            </a:endParaRPr>
+          </a:p>
+          <a:p>
+            <a:pPr marL="0" marR="0" lvl="0" indent="0" algn="l" rtl="0">
+              <a:spcBef>
+                <a:spcPts val="0"/>
+              </a:spcBef>
+              <a:spcAft>
+                <a:spcPts val="0"/>
+              </a:spcAft>
+              <a:buClr>
+                <a:schemeClr val="dk1"/>
+              </a:buClr>
+              <a:buSzPts val="3200"/>
+              <a:buFont typeface="Courier New"/>
+              <a:buNone/>
+            </a:pPr>
+            <a:r>
+              <a:rPr lang="en-US" sz="3200" b="1" dirty="0">
+                <a:latin typeface="Courier New"/>
+                <a:ea typeface="Courier New"/>
+                <a:cs typeface="Courier New"/>
+                <a:sym typeface="Courier New"/>
+              </a:rPr>
+              <a:t>}</a:t>
+            </a:r>
+            <a:endParaRPr sz="3200" b="1" dirty="0">
+              <a:latin typeface="Times New Roman"/>
+              <a:ea typeface="Times New Roman"/>
+              <a:cs typeface="Times New Roman"/>
+              <a:sym typeface="Times New Roman"/>
+            </a:endParaRPr>
+          </a:p>
+        </p:txBody>
+      </p:sp>
+      <p:sp>
+        <p:nvSpPr>
+          <p:cNvPr id="632" name="Google Shape;632;p66"/>
+          <p:cNvSpPr txBox="1"/>
+          <p:nvPr/>
+        </p:nvSpPr>
+        <p:spPr>
+          <a:xfrm>
+            <a:off x="381000" y="4150113"/>
+            <a:ext cx="8610600" cy="2554505"/>
+          </a:xfrm>
+          <a:prstGeom prst="rect">
+            <a:avLst/>
+          </a:prstGeom>
+          <a:noFill/>
+          <a:ln>
+            <a:noFill/>
+          </a:ln>
+        </p:spPr>
+        <p:txBody>
+          <a:bodyPr spcFirstLastPara="1" wrap="square" lIns="91425" tIns="45700" rIns="91425" bIns="45700" anchor="t" anchorCtr="0">
+            <a:spAutoFit/>
+          </a:bodyPr>
+          <a:lstStyle/>
+          <a:p>
+            <a:pPr marL="0" marR="0" lvl="0" indent="0" algn="l" rtl="0">
+              <a:spcBef>
+                <a:spcPts val="0"/>
+              </a:spcBef>
+              <a:spcAft>
+                <a:spcPts val="0"/>
+              </a:spcAft>
+              <a:buNone/>
+            </a:pPr>
+            <a:r>
+              <a:rPr lang="en-US" sz="4000" dirty="0">
+                <a:solidFill>
+                  <a:srgbClr val="FF0000"/>
+                </a:solidFill>
+                <a:latin typeface="Tahoma"/>
+                <a:ea typeface="Tahoma"/>
+                <a:cs typeface="Tahoma"/>
+                <a:sym typeface="Tahoma"/>
+              </a:rPr>
+              <a:t>Invalid! – you CAN declare a method as private, but it must be concrete. The final variable was initialized, so that part is good.</a:t>
+            </a:r>
+            <a:endParaRPr dirty="0">
+              <a:solidFill>
+                <a:srgbClr val="FF0000"/>
+              </a:solidFill>
+            </a:endParaRPr>
+          </a:p>
+        </p:txBody>
+      </p:sp>
+    </p:spTree>
+  </p:cSld>
+  <p:clrMapOvr>
+    <a:masterClrMapping/>
+  </p:clrMapOvr>
+  <p:timing>
+    <p:tnLst>
+      <p:par>
+        <p:cTn id="1" dur="indefinite" restart="never" nodeType="tmRoot">
+          <p:childTnLst>
+            <p:seq concurrent="1" nextAc="seek">
+              <p:cTn id="2" dur="indefinite" nodeType="mainSeq">
+                <p:childTnLst>
+                  <p:par>
+                    <p:cTn id="3" fill="hold">
+                      <p:stCondLst>
+                        <p:cond delay="indefinite"/>
+                      </p:stCondLst>
+                      <p:childTnLst>
+                        <p:par>
+                          <p:cTn id="4" fill="hold">
+                            <p:stCondLst>
+                              <p:cond delay="0"/>
+                            </p:stCondLst>
+                            <p:childTnLst>
+                              <p:par>
+                                <p:cTn id="5" presetID="10" presetClass="entr" presetSubtype="0" fill="hold" nodeType="clickEffect">
+                                  <p:stCondLst>
+                                    <p:cond delay="0"/>
+                                  </p:stCondLst>
+                                  <p:childTnLst>
+                                    <p:set>
+                                      <p:cBhvr>
+                                        <p:cTn id="6" dur="1" fill="hold">
+                                          <p:stCondLst>
+                                            <p:cond delay="0"/>
+                                          </p:stCondLst>
+                                        </p:cTn>
+                                        <p:tgtEl>
+                                          <p:spTgt spid="632"/>
+                                        </p:tgtEl>
+                                        <p:attrNameLst>
+                                          <p:attrName>style.visibility</p:attrName>
+                                        </p:attrNameLst>
+                                      </p:cBhvr>
+                                      <p:to>
+                                        <p:strVal val="visible"/>
+                                      </p:to>
+                                    </p:set>
+                                    <p:animEffect transition="in" filter="fade">
+                                      <p:cBhvr>
+                                        <p:cTn id="7" dur="2000"/>
+                                        <p:tgtEl>
+                                          <p:spTgt spid="632"/>
+                                        </p:tgtEl>
+                                      </p:cBhvr>
+                                    </p:animEffect>
+                                  </p:childTnLst>
+                                </p:cTn>
+                              </p:par>
+                            </p:childTnLst>
+                          </p:cTn>
+                        </p:par>
+                      </p:childTnLst>
+                    </p:cTn>
+                  </p:par>
+                </p:childTnLst>
+              </p:cTn>
+              <p:prevCondLst>
+                <p:cond evt="onPrev" delay="0">
+                  <p:tgtEl>
+                    <p:sldTgt/>
+                  </p:tgtEl>
+                </p:cond>
+              </p:prevCondLst>
+              <p:nextCondLst>
+                <p:cond evt="onNext" delay="0">
+                  <p:tgtEl>
+                    <p:sldTgt/>
+                  </p:tgtEl>
+                </p:cond>
+              </p:nextCondLst>
+            </p:seq>
+          </p:childTnLst>
+        </p:cTn>
+      </p:par>
+    </p:tnLst>
+  </p:timing>
+</p:sld>
+</file>
+
+<file path=ppt/slides/slide32.xml><?xml version="1.0" encoding="utf-8"?>
+<p:sld xmlns:a="http://schemas.openxmlformats.org/drawingml/2006/main" xmlns:r="http://schemas.openxmlformats.org/officeDocument/2006/relationships" xmlns:p="http://schemas.openxmlformats.org/presentationml/2006/main">
+  <p:cSld>
+    <p:spTree>
+      <p:nvGrpSpPr>
         <p:cNvPr id="1" name=""/>
         <p:cNvGrpSpPr/>
         <p:nvPr/>
@@ -16988,7 +18060,7 @@
 </p:sld>
 </file>
 
-<file path=ppt/slides/slide31.xml><?xml version="1.0" encoding="utf-8"?>
+<file path=ppt/slides/slide33.xml><?xml version="1.0" encoding="utf-8"?>
 <p:sld xmlns:a="http://schemas.openxmlformats.org/drawingml/2006/main" xmlns:r="http://schemas.openxmlformats.org/officeDocument/2006/relationships" xmlns:p="http://schemas.openxmlformats.org/presentationml/2006/main">
   <p:cSld>
     <p:spTree>
@@ -17370,7 +18442,7 @@
 </p:sld>
 </file>
 
-<file path=ppt/slides/slide32.xml><?xml version="1.0" encoding="utf-8"?>
+<file path=ppt/slides/slide34.xml><?xml version="1.0" encoding="utf-8"?>
 <p:sld xmlns:a="http://schemas.openxmlformats.org/drawingml/2006/main" xmlns:r="http://schemas.openxmlformats.org/officeDocument/2006/relationships" xmlns:p="http://schemas.openxmlformats.org/presentationml/2006/main">
   <p:cSld>
     <p:spTree>
@@ -17783,7 +18855,7 @@
 </p:sld>
 </file>
 
-<file path=ppt/slides/slide33.xml><?xml version="1.0" encoding="utf-8"?>
+<file path=ppt/slides/slide35.xml><?xml version="1.0" encoding="utf-8"?>
 <p:sld xmlns:a="http://schemas.openxmlformats.org/drawingml/2006/main" xmlns:r="http://schemas.openxmlformats.org/officeDocument/2006/relationships" xmlns:p="http://schemas.openxmlformats.org/presentationml/2006/main">
   <p:cSld>
     <p:spTree>
@@ -18271,7 +19343,7 @@
 </p:sld>
 </file>
 
-<file path=ppt/slides/slide34.xml><?xml version="1.0" encoding="utf-8"?>
+<file path=ppt/slides/slide36.xml><?xml version="1.0" encoding="utf-8"?>
 <p:sld xmlns:a="http://schemas.openxmlformats.org/drawingml/2006/main" xmlns:r="http://schemas.openxmlformats.org/officeDocument/2006/relationships" xmlns:p="http://schemas.openxmlformats.org/presentationml/2006/main">
   <p:cSld>
     <p:spTree>
